--- a/library/lectures/lec-11/rendered/lec-11.pptx
+++ b/library/lectures/lec-11/rendered/lec-11.pptx
@@ -11771,92 +11771,33 @@
           </a:p>
         </p:txBody>
       </p:sp>
-      <p:sp>
-        <p:nvSpPr>
-          <p:cNvPr id="8" name="Rectangle 7"/>
-          <p:cNvSpPr/>
-          <p:nvPr/>
-        </p:nvSpPr>
-        <p:spPr>
-          <a:xfrm>
-            <a:off x="640080" y="2788920"/>
-            <a:ext cx="3337560" cy="1371600"/>
-          </a:xfrm>
-          <a:prstGeom prst="rect">
-            <a:avLst/>
-          </a:prstGeom>
-          <a:solidFill>
-            <a:srgbClr val="E5EAF0"/>
-          </a:solidFill>
-          <a:ln>
-            <a:noFill/>
-          </a:ln>
-          <a:effectLst/>
-        </p:spPr>
-        <p:style>
-          <a:lnRef idx="1">
-            <a:schemeClr val="accent1"/>
-          </a:lnRef>
-          <a:fillRef idx="3">
-            <a:schemeClr val="accent1"/>
-          </a:fillRef>
-          <a:effectRef idx="2">
-            <a:schemeClr val="accent1"/>
-          </a:effectRef>
-          <a:fontRef idx="minor">
-            <a:schemeClr val="lt1"/>
-          </a:fontRef>
-        </p:style>
-        <p:txBody>
-          <a:bodyPr rtlCol="0" anchor="ctr"/>
-          <a:lstStyle/>
-          <a:p>
-            <a:pPr algn="ctr"/>
-          </a:p>
-        </p:txBody>
-      </p:sp>
+      <p:pic>
+        <p:nvPicPr>
+          <p:cNvPr id="8" name="Picture 7" descr="factory.png"/>
+          <p:cNvPicPr>
+            <a:picLocks noChangeAspect="1"/>
+          </p:cNvPicPr>
+          <p:nvPr/>
+        </p:nvPicPr>
+        <p:blipFill>
+          <a:blip r:embed="rId2"/>
+          <a:stretch>
+            <a:fillRect/>
+          </a:stretch>
+        </p:blipFill>
+        <p:spPr>
+          <a:xfrm>
+            <a:off x="1760219" y="2880360"/>
+            <a:ext cx="1097280" cy="1097280"/>
+          </a:xfrm>
+          <a:prstGeom prst="rect">
+            <a:avLst/>
+          </a:prstGeom>
+        </p:spPr>
+      </p:pic>
       <p:sp>
         <p:nvSpPr>
           <p:cNvPr id="9" name="TextBox 8"/>
-          <p:cNvSpPr txBox="1"/>
-          <p:nvPr/>
-        </p:nvSpPr>
-        <p:spPr>
-          <a:xfrm>
-            <a:off x="640080" y="3383280"/>
-            <a:ext cx="3337560" cy="365760"/>
-          </a:xfrm>
-          <a:prstGeom prst="rect">
-            <a:avLst/>
-          </a:prstGeom>
-          <a:noFill/>
-        </p:spPr>
-        <p:txBody>
-          <a:bodyPr wrap="square" lIns="0" rIns="0" tIns="0" bIns="0" anchor="t">
-            <a:spAutoFit/>
-          </a:bodyPr>
-          <a:lstStyle/>
-          <a:p>
-            <a:pPr algn="ctr">
-              <a:lnSpc>
-                <a:spcPct val="115000"/>
-              </a:lnSpc>
-            </a:pPr>
-            <a:r>
-              <a:rPr sz="1100" b="0" i="0">
-                <a:solidFill>
-                  <a:srgbClr val="6B7685"/>
-                </a:solidFill>
-                <a:latin typeface="Arial"/>
-              </a:rPr>
-              <a:t>[фото]</a:t>
-            </a:r>
-          </a:p>
-        </p:txBody>
-      </p:sp>
-      <p:sp>
-        <p:nvSpPr>
-          <p:cNvPr id="10" name="TextBox 9"/>
           <p:cNvSpPr txBox="1"/>
           <p:nvPr/>
         </p:nvSpPr>
@@ -11895,7 +11836,7 @@
       </p:sp>
       <p:sp>
         <p:nvSpPr>
-          <p:cNvPr id="11" name="TextBox 10"/>
+          <p:cNvPr id="10" name="TextBox 9"/>
           <p:cNvSpPr txBox="1"/>
           <p:nvPr/>
         </p:nvSpPr>
@@ -11934,7 +11875,7 @@
       </p:sp>
       <p:sp>
         <p:nvSpPr>
-          <p:cNvPr id="12" name="TextBox 11"/>
+          <p:cNvPr id="11" name="TextBox 10"/>
           <p:cNvSpPr txBox="1"/>
           <p:nvPr/>
         </p:nvSpPr>
@@ -11973,7 +11914,7 @@
       </p:sp>
       <p:sp>
         <p:nvSpPr>
-          <p:cNvPr id="13" name="Rounded Rectangle 12"/>
+          <p:cNvPr id="12" name="Rounded Rectangle 11"/>
           <p:cNvSpPr/>
           <p:nvPr/>
         </p:nvSpPr>
@@ -12021,7 +11962,7 @@
       </p:sp>
       <p:sp>
         <p:nvSpPr>
-          <p:cNvPr id="14" name="TextBox 13"/>
+          <p:cNvPr id="13" name="TextBox 12"/>
           <p:cNvSpPr txBox="1"/>
           <p:nvPr/>
         </p:nvSpPr>
@@ -12060,7 +12001,7 @@
       </p:sp>
       <p:sp>
         <p:nvSpPr>
-          <p:cNvPr id="15" name="Rounded Rectangle 14"/>
+          <p:cNvPr id="14" name="Rounded Rectangle 13"/>
           <p:cNvSpPr/>
           <p:nvPr/>
         </p:nvSpPr>
@@ -12108,7 +12049,7 @@
       </p:sp>
       <p:sp>
         <p:nvSpPr>
-          <p:cNvPr id="16" name="Rectangle 15"/>
+          <p:cNvPr id="15" name="Rectangle 14"/>
           <p:cNvSpPr/>
           <p:nvPr/>
         </p:nvSpPr>
@@ -12152,7 +12093,7 @@
       </p:sp>
       <p:sp>
         <p:nvSpPr>
-          <p:cNvPr id="17" name="TextBox 16"/>
+          <p:cNvPr id="16" name="TextBox 15"/>
           <p:cNvSpPr txBox="1"/>
           <p:nvPr/>
         </p:nvSpPr>
@@ -12191,7 +12132,7 @@
       </p:sp>
       <p:sp>
         <p:nvSpPr>
-          <p:cNvPr id="18" name="TextBox 17"/>
+          <p:cNvPr id="17" name="TextBox 16"/>
           <p:cNvSpPr txBox="1"/>
           <p:nvPr/>
         </p:nvSpPr>
@@ -12230,14 +12171,14 @@
       </p:sp>
       <p:pic>
         <p:nvPicPr>
-          <p:cNvPr id="19" name="Picture 18" descr="s14-tsmc.jpg"/>
+          <p:cNvPr id="18" name="Picture 17" descr="s14-tsmc.jpg"/>
           <p:cNvPicPr>
             <a:picLocks noChangeAspect="1"/>
           </p:cNvPicPr>
           <p:nvPr/>
         </p:nvPicPr>
         <p:blipFill>
-          <a:blip r:embed="rId2"/>
+          <a:blip r:embed="rId3"/>
           <a:stretch>
             <a:fillRect/>
           </a:stretch>
@@ -12254,7 +12195,7 @@
       </p:pic>
       <p:sp>
         <p:nvSpPr>
-          <p:cNvPr id="20" name="TextBox 19"/>
+          <p:cNvPr id="19" name="TextBox 18"/>
           <p:cNvSpPr txBox="1"/>
           <p:nvPr/>
         </p:nvSpPr>
@@ -12293,7 +12234,7 @@
       </p:sp>
       <p:sp>
         <p:nvSpPr>
-          <p:cNvPr id="21" name="TextBox 20"/>
+          <p:cNvPr id="20" name="TextBox 19"/>
           <p:cNvSpPr txBox="1"/>
           <p:nvPr/>
         </p:nvSpPr>
@@ -12332,7 +12273,7 @@
       </p:sp>
       <p:sp>
         <p:nvSpPr>
-          <p:cNvPr id="22" name="TextBox 21"/>
+          <p:cNvPr id="21" name="TextBox 20"/>
           <p:cNvSpPr txBox="1"/>
           <p:nvPr/>
         </p:nvSpPr>
@@ -12371,7 +12312,7 @@
       </p:sp>
       <p:sp>
         <p:nvSpPr>
-          <p:cNvPr id="23" name="Rounded Rectangle 22"/>
+          <p:cNvPr id="22" name="Rounded Rectangle 21"/>
           <p:cNvSpPr/>
           <p:nvPr/>
         </p:nvSpPr>
@@ -12419,7 +12360,7 @@
       </p:sp>
       <p:sp>
         <p:nvSpPr>
-          <p:cNvPr id="24" name="TextBox 23"/>
+          <p:cNvPr id="23" name="TextBox 22"/>
           <p:cNvSpPr txBox="1"/>
           <p:nvPr/>
         </p:nvSpPr>
@@ -12458,7 +12399,7 @@
       </p:sp>
       <p:sp>
         <p:nvSpPr>
-          <p:cNvPr id="25" name="Rounded Rectangle 24"/>
+          <p:cNvPr id="24" name="Rounded Rectangle 23"/>
           <p:cNvSpPr/>
           <p:nvPr/>
         </p:nvSpPr>
@@ -12506,7 +12447,7 @@
       </p:sp>
       <p:sp>
         <p:nvSpPr>
-          <p:cNvPr id="26" name="Rectangle 25"/>
+          <p:cNvPr id="25" name="Rectangle 24"/>
           <p:cNvSpPr/>
           <p:nvPr/>
         </p:nvSpPr>
@@ -12550,7 +12491,7 @@
       </p:sp>
       <p:sp>
         <p:nvSpPr>
-          <p:cNvPr id="27" name="TextBox 26"/>
+          <p:cNvPr id="26" name="TextBox 25"/>
           <p:cNvSpPr txBox="1"/>
           <p:nvPr/>
         </p:nvSpPr>
@@ -12589,7 +12530,7 @@
       </p:sp>
       <p:sp>
         <p:nvSpPr>
-          <p:cNvPr id="28" name="TextBox 27"/>
+          <p:cNvPr id="27" name="TextBox 26"/>
           <p:cNvSpPr txBox="1"/>
           <p:nvPr/>
         </p:nvSpPr>
@@ -12626,92 +12567,33 @@
           </a:p>
         </p:txBody>
       </p:sp>
-      <p:sp>
-        <p:nvSpPr>
-          <p:cNvPr id="29" name="Rectangle 28"/>
-          <p:cNvSpPr/>
-          <p:nvPr/>
-        </p:nvSpPr>
-        <p:spPr>
-          <a:xfrm>
-            <a:off x="8229599" y="2788920"/>
-            <a:ext cx="3337560" cy="1371600"/>
-          </a:xfrm>
-          <a:prstGeom prst="rect">
-            <a:avLst/>
-          </a:prstGeom>
-          <a:solidFill>
-            <a:srgbClr val="E5EAF0"/>
-          </a:solidFill>
-          <a:ln>
-            <a:noFill/>
-          </a:ln>
-          <a:effectLst/>
-        </p:spPr>
-        <p:style>
-          <a:lnRef idx="1">
-            <a:schemeClr val="accent1"/>
-          </a:lnRef>
-          <a:fillRef idx="3">
-            <a:schemeClr val="accent1"/>
-          </a:fillRef>
-          <a:effectRef idx="2">
-            <a:schemeClr val="accent1"/>
-          </a:effectRef>
-          <a:fontRef idx="minor">
-            <a:schemeClr val="lt1"/>
-          </a:fontRef>
-        </p:style>
-        <p:txBody>
-          <a:bodyPr rtlCol="0" anchor="ctr"/>
-          <a:lstStyle/>
-          <a:p>
-            <a:pPr algn="ctr"/>
-          </a:p>
-        </p:txBody>
-      </p:sp>
-      <p:sp>
-        <p:nvSpPr>
-          <p:cNvPr id="30" name="TextBox 29"/>
-          <p:cNvSpPr txBox="1"/>
-          <p:nvPr/>
-        </p:nvSpPr>
-        <p:spPr>
-          <a:xfrm>
-            <a:off x="8229599" y="3383280"/>
-            <a:ext cx="3337560" cy="365760"/>
-          </a:xfrm>
-          <a:prstGeom prst="rect">
-            <a:avLst/>
-          </a:prstGeom>
-          <a:noFill/>
-        </p:spPr>
-        <p:txBody>
-          <a:bodyPr wrap="square" lIns="0" rIns="0" tIns="0" bIns="0" anchor="t">
-            <a:spAutoFit/>
-          </a:bodyPr>
-          <a:lstStyle/>
-          <a:p>
-            <a:pPr algn="ctr">
-              <a:lnSpc>
-                <a:spcPct val="115000"/>
-              </a:lnSpc>
-            </a:pPr>
-            <a:r>
-              <a:rPr sz="1100" b="0" i="0">
-                <a:solidFill>
-                  <a:srgbClr val="6B7685"/>
-                </a:solidFill>
-                <a:latin typeface="Arial"/>
-              </a:rPr>
-              <a:t>[фото]</a:t>
-            </a:r>
-          </a:p>
-        </p:txBody>
-      </p:sp>
-      <p:sp>
-        <p:nvSpPr>
-          <p:cNvPr id="31" name="TextBox 30"/>
+      <p:pic>
+        <p:nvPicPr>
+          <p:cNvPr id="28" name="Picture 27" descr="shield-check.png"/>
+          <p:cNvPicPr>
+            <a:picLocks noChangeAspect="1"/>
+          </p:cNvPicPr>
+          <p:nvPr/>
+        </p:nvPicPr>
+        <p:blipFill>
+          <a:blip r:embed="rId4"/>
+          <a:stretch>
+            <a:fillRect/>
+          </a:stretch>
+        </p:blipFill>
+        <p:spPr>
+          <a:xfrm>
+            <a:off x="9349740" y="2880360"/>
+            <a:ext cx="1097280" cy="1097280"/>
+          </a:xfrm>
+          <a:prstGeom prst="rect">
+            <a:avLst/>
+          </a:prstGeom>
+        </p:spPr>
+      </p:pic>
+      <p:sp>
+        <p:nvSpPr>
+          <p:cNvPr id="29" name="TextBox 28"/>
           <p:cNvSpPr txBox="1"/>
           <p:nvPr/>
         </p:nvSpPr>
@@ -12750,7 +12632,7 @@
       </p:sp>
       <p:sp>
         <p:nvSpPr>
-          <p:cNvPr id="32" name="TextBox 31"/>
+          <p:cNvPr id="30" name="TextBox 29"/>
           <p:cNvSpPr txBox="1"/>
           <p:nvPr/>
         </p:nvSpPr>
@@ -12789,7 +12671,7 @@
       </p:sp>
       <p:sp>
         <p:nvSpPr>
-          <p:cNvPr id="33" name="TextBox 32"/>
+          <p:cNvPr id="31" name="TextBox 30"/>
           <p:cNvSpPr txBox="1"/>
           <p:nvPr/>
         </p:nvSpPr>
@@ -12828,7 +12710,7 @@
       </p:sp>
       <p:sp>
         <p:nvSpPr>
-          <p:cNvPr id="34" name="Rounded Rectangle 33"/>
+          <p:cNvPr id="32" name="Rounded Rectangle 31"/>
           <p:cNvSpPr/>
           <p:nvPr/>
         </p:nvSpPr>
@@ -12876,7 +12758,7 @@
       </p:sp>
       <p:sp>
         <p:nvSpPr>
-          <p:cNvPr id="35" name="TextBox 34"/>
+          <p:cNvPr id="33" name="TextBox 32"/>
           <p:cNvSpPr txBox="1"/>
           <p:nvPr/>
         </p:nvSpPr>
@@ -12915,7 +12797,7 @@
       </p:sp>
       <p:sp>
         <p:nvSpPr>
-          <p:cNvPr id="36" name="Rounded Rectangle 35"/>
+          <p:cNvPr id="34" name="Rounded Rectangle 33"/>
           <p:cNvSpPr/>
           <p:nvPr/>
         </p:nvSpPr>
@@ -12963,7 +12845,7 @@
       </p:sp>
       <p:sp>
         <p:nvSpPr>
-          <p:cNvPr id="37" name="TextBox 36"/>
+          <p:cNvPr id="35" name="TextBox 34"/>
           <p:cNvSpPr txBox="1"/>
           <p:nvPr/>
         </p:nvSpPr>
@@ -13002,7 +12884,7 @@
       </p:sp>
       <p:sp>
         <p:nvSpPr>
-          <p:cNvPr id="38" name="TextBox 37"/>
+          <p:cNvPr id="36" name="TextBox 35"/>
           <p:cNvSpPr txBox="1"/>
           <p:nvPr/>
         </p:nvSpPr>
@@ -15232,92 +15114,33 @@
           </a:p>
         </p:txBody>
       </p:sp>
-      <p:sp>
-        <p:nvSpPr>
-          <p:cNvPr id="8" name="Rectangle 7"/>
-          <p:cNvSpPr/>
-          <p:nvPr/>
-        </p:nvSpPr>
-        <p:spPr>
-          <a:xfrm>
-            <a:off x="731520" y="2834639"/>
-            <a:ext cx="3154679" cy="1828800"/>
-          </a:xfrm>
-          <a:prstGeom prst="rect">
-            <a:avLst/>
-          </a:prstGeom>
-          <a:solidFill>
-            <a:srgbClr val="E5EAF0"/>
-          </a:solidFill>
-          <a:ln>
-            <a:noFill/>
-          </a:ln>
-          <a:effectLst/>
-        </p:spPr>
-        <p:style>
-          <a:lnRef idx="1">
-            <a:schemeClr val="accent1"/>
-          </a:lnRef>
-          <a:fillRef idx="3">
-            <a:schemeClr val="accent1"/>
-          </a:fillRef>
-          <a:effectRef idx="2">
-            <a:schemeClr val="accent1"/>
-          </a:effectRef>
-          <a:fontRef idx="minor">
-            <a:schemeClr val="lt1"/>
-          </a:fontRef>
-        </p:style>
-        <p:txBody>
-          <a:bodyPr rtlCol="0" anchor="ctr"/>
-          <a:lstStyle/>
-          <a:p>
-            <a:pPr algn="ctr"/>
-          </a:p>
-        </p:txBody>
-      </p:sp>
+      <p:pic>
+        <p:nvPicPr>
+          <p:cNvPr id="8" name="Picture 7" descr="cog.png"/>
+          <p:cNvPicPr>
+            <a:picLocks noChangeAspect="1"/>
+          </p:cNvPicPr>
+          <p:nvPr/>
+        </p:nvPicPr>
+        <p:blipFill>
+          <a:blip r:embed="rId2"/>
+          <a:stretch>
+            <a:fillRect/>
+          </a:stretch>
+        </p:blipFill>
+        <p:spPr>
+          <a:xfrm>
+            <a:off x="1485900" y="2880360"/>
+            <a:ext cx="1645920" cy="1645920"/>
+          </a:xfrm>
+          <a:prstGeom prst="rect">
+            <a:avLst/>
+          </a:prstGeom>
+        </p:spPr>
+      </p:pic>
       <p:sp>
         <p:nvSpPr>
           <p:cNvPr id="9" name="TextBox 8"/>
-          <p:cNvSpPr txBox="1"/>
-          <p:nvPr/>
-        </p:nvSpPr>
-        <p:spPr>
-          <a:xfrm>
-            <a:off x="731520" y="3383280"/>
-            <a:ext cx="3154679" cy="457200"/>
-          </a:xfrm>
-          <a:prstGeom prst="rect">
-            <a:avLst/>
-          </a:prstGeom>
-          <a:noFill/>
-        </p:spPr>
-        <p:txBody>
-          <a:bodyPr wrap="square" lIns="0" rIns="0" tIns="0" bIns="0" anchor="t">
-            <a:spAutoFit/>
-          </a:bodyPr>
-          <a:lstStyle/>
-          <a:p>
-            <a:pPr algn="ctr">
-              <a:lnSpc>
-                <a:spcPct val="115000"/>
-              </a:lnSpc>
-            </a:pPr>
-            <a:r>
-              <a:rPr sz="1100" b="0" i="0">
-                <a:solidFill>
-                  <a:srgbClr val="6B7685"/>
-                </a:solidFill>
-                <a:latin typeface="Arial"/>
-              </a:rPr>
-              <a:t>[фото]</a:t>
-            </a:r>
-          </a:p>
-        </p:txBody>
-      </p:sp>
-      <p:sp>
-        <p:nvSpPr>
-          <p:cNvPr id="10" name="TextBox 9"/>
           <p:cNvSpPr txBox="1"/>
           <p:nvPr/>
         </p:nvSpPr>
@@ -15357,7 +15180,7 @@
       </p:sp>
       <p:sp>
         <p:nvSpPr>
-          <p:cNvPr id="11" name="Rounded Rectangle 10"/>
+          <p:cNvPr id="10" name="Rounded Rectangle 9"/>
           <p:cNvSpPr/>
           <p:nvPr/>
         </p:nvSpPr>
@@ -15405,7 +15228,7 @@
       </p:sp>
       <p:sp>
         <p:nvSpPr>
-          <p:cNvPr id="12" name="Rectangle 11"/>
+          <p:cNvPr id="11" name="Rectangle 10"/>
           <p:cNvSpPr/>
           <p:nvPr/>
         </p:nvSpPr>
@@ -15449,7 +15272,7 @@
       </p:sp>
       <p:sp>
         <p:nvSpPr>
-          <p:cNvPr id="13" name="TextBox 12"/>
+          <p:cNvPr id="12" name="TextBox 11"/>
           <p:cNvSpPr txBox="1"/>
           <p:nvPr/>
         </p:nvSpPr>
@@ -15488,7 +15311,7 @@
       </p:sp>
       <p:sp>
         <p:nvSpPr>
-          <p:cNvPr id="14" name="TextBox 13"/>
+          <p:cNvPr id="13" name="TextBox 12"/>
           <p:cNvSpPr txBox="1"/>
           <p:nvPr/>
         </p:nvSpPr>
@@ -15525,92 +15348,33 @@
           </a:p>
         </p:txBody>
       </p:sp>
-      <p:sp>
-        <p:nvSpPr>
-          <p:cNvPr id="15" name="Rectangle 14"/>
-          <p:cNvSpPr/>
-          <p:nvPr/>
-        </p:nvSpPr>
-        <p:spPr>
-          <a:xfrm>
-            <a:off x="4526279" y="2834639"/>
-            <a:ext cx="3154679" cy="1828800"/>
-          </a:xfrm>
-          <a:prstGeom prst="rect">
-            <a:avLst/>
-          </a:prstGeom>
-          <a:solidFill>
-            <a:srgbClr val="E5EAF0"/>
-          </a:solidFill>
-          <a:ln>
-            <a:noFill/>
-          </a:ln>
-          <a:effectLst/>
-        </p:spPr>
-        <p:style>
-          <a:lnRef idx="1">
-            <a:schemeClr val="accent1"/>
-          </a:lnRef>
-          <a:fillRef idx="3">
-            <a:schemeClr val="accent1"/>
-          </a:fillRef>
-          <a:effectRef idx="2">
-            <a:schemeClr val="accent1"/>
-          </a:effectRef>
-          <a:fontRef idx="minor">
-            <a:schemeClr val="lt1"/>
-          </a:fontRef>
-        </p:style>
-        <p:txBody>
-          <a:bodyPr rtlCol="0" anchor="ctr"/>
-          <a:lstStyle/>
-          <a:p>
-            <a:pPr algn="ctr"/>
-          </a:p>
-        </p:txBody>
-      </p:sp>
-      <p:sp>
-        <p:nvSpPr>
-          <p:cNvPr id="16" name="TextBox 15"/>
-          <p:cNvSpPr txBox="1"/>
-          <p:nvPr/>
-        </p:nvSpPr>
-        <p:spPr>
-          <a:xfrm>
-            <a:off x="4526279" y="3383280"/>
-            <a:ext cx="3154679" cy="457200"/>
-          </a:xfrm>
-          <a:prstGeom prst="rect">
-            <a:avLst/>
-          </a:prstGeom>
-          <a:noFill/>
-        </p:spPr>
-        <p:txBody>
-          <a:bodyPr wrap="square" lIns="0" rIns="0" tIns="0" bIns="0" anchor="t">
-            <a:spAutoFit/>
-          </a:bodyPr>
-          <a:lstStyle/>
-          <a:p>
-            <a:pPr algn="ctr">
-              <a:lnSpc>
-                <a:spcPct val="115000"/>
-              </a:lnSpc>
-            </a:pPr>
-            <a:r>
-              <a:rPr sz="1100" b="0" i="0">
-                <a:solidFill>
-                  <a:srgbClr val="6B7685"/>
-                </a:solidFill>
-                <a:latin typeface="Arial"/>
-              </a:rPr>
-              <a:t>[фото]</a:t>
-            </a:r>
-          </a:p>
-        </p:txBody>
-      </p:sp>
-      <p:sp>
-        <p:nvSpPr>
-          <p:cNvPr id="17" name="TextBox 16"/>
+      <p:pic>
+        <p:nvPicPr>
+          <p:cNvPr id="14" name="Picture 13" descr="users.png"/>
+          <p:cNvPicPr>
+            <a:picLocks noChangeAspect="1"/>
+          </p:cNvPicPr>
+          <p:nvPr/>
+        </p:nvPicPr>
+        <p:blipFill>
+          <a:blip r:embed="rId3"/>
+          <a:stretch>
+            <a:fillRect/>
+          </a:stretch>
+        </p:blipFill>
+        <p:spPr>
+          <a:xfrm>
+            <a:off x="5280659" y="2880360"/>
+            <a:ext cx="1645920" cy="1645920"/>
+          </a:xfrm>
+          <a:prstGeom prst="rect">
+            <a:avLst/>
+          </a:prstGeom>
+        </p:spPr>
+      </p:pic>
+      <p:sp>
+        <p:nvSpPr>
+          <p:cNvPr id="15" name="TextBox 14"/>
           <p:cNvSpPr txBox="1"/>
           <p:nvPr/>
         </p:nvSpPr>
@@ -15650,7 +15414,7 @@
       </p:sp>
       <p:sp>
         <p:nvSpPr>
-          <p:cNvPr id="18" name="Rounded Rectangle 17"/>
+          <p:cNvPr id="16" name="Rounded Rectangle 15"/>
           <p:cNvSpPr/>
           <p:nvPr/>
         </p:nvSpPr>
@@ -15698,7 +15462,7 @@
       </p:sp>
       <p:sp>
         <p:nvSpPr>
-          <p:cNvPr id="19" name="Rectangle 18"/>
+          <p:cNvPr id="17" name="Rectangle 16"/>
           <p:cNvSpPr/>
           <p:nvPr/>
         </p:nvSpPr>
@@ -15742,7 +15506,7 @@
       </p:sp>
       <p:sp>
         <p:nvSpPr>
-          <p:cNvPr id="20" name="TextBox 19"/>
+          <p:cNvPr id="18" name="TextBox 17"/>
           <p:cNvSpPr txBox="1"/>
           <p:nvPr/>
         </p:nvSpPr>
@@ -15781,7 +15545,7 @@
       </p:sp>
       <p:sp>
         <p:nvSpPr>
-          <p:cNvPr id="21" name="TextBox 20"/>
+          <p:cNvPr id="19" name="TextBox 18"/>
           <p:cNvSpPr txBox="1"/>
           <p:nvPr/>
         </p:nvSpPr>
@@ -15818,92 +15582,33 @@
           </a:p>
         </p:txBody>
       </p:sp>
-      <p:sp>
-        <p:nvSpPr>
-          <p:cNvPr id="22" name="Rectangle 21"/>
-          <p:cNvSpPr/>
-          <p:nvPr/>
-        </p:nvSpPr>
-        <p:spPr>
-          <a:xfrm>
-            <a:off x="8321040" y="2834639"/>
-            <a:ext cx="3154679" cy="1828800"/>
-          </a:xfrm>
-          <a:prstGeom prst="rect">
-            <a:avLst/>
-          </a:prstGeom>
-          <a:solidFill>
-            <a:srgbClr val="E5EAF0"/>
-          </a:solidFill>
-          <a:ln>
-            <a:noFill/>
-          </a:ln>
-          <a:effectLst/>
-        </p:spPr>
-        <p:style>
-          <a:lnRef idx="1">
-            <a:schemeClr val="accent1"/>
-          </a:lnRef>
-          <a:fillRef idx="3">
-            <a:schemeClr val="accent1"/>
-          </a:fillRef>
-          <a:effectRef idx="2">
-            <a:schemeClr val="accent1"/>
-          </a:effectRef>
-          <a:fontRef idx="minor">
-            <a:schemeClr val="lt1"/>
-          </a:fontRef>
-        </p:style>
-        <p:txBody>
-          <a:bodyPr rtlCol="0" anchor="ctr"/>
-          <a:lstStyle/>
-          <a:p>
-            <a:pPr algn="ctr"/>
-          </a:p>
-        </p:txBody>
-      </p:sp>
-      <p:sp>
-        <p:nvSpPr>
-          <p:cNvPr id="23" name="TextBox 22"/>
-          <p:cNvSpPr txBox="1"/>
-          <p:nvPr/>
-        </p:nvSpPr>
-        <p:spPr>
-          <a:xfrm>
-            <a:off x="8321040" y="3383280"/>
-            <a:ext cx="3154679" cy="457200"/>
-          </a:xfrm>
-          <a:prstGeom prst="rect">
-            <a:avLst/>
-          </a:prstGeom>
-          <a:noFill/>
-        </p:spPr>
-        <p:txBody>
-          <a:bodyPr wrap="square" lIns="0" rIns="0" tIns="0" bIns="0" anchor="t">
-            <a:spAutoFit/>
-          </a:bodyPr>
-          <a:lstStyle/>
-          <a:p>
-            <a:pPr algn="ctr">
-              <a:lnSpc>
-                <a:spcPct val="115000"/>
-              </a:lnSpc>
-            </a:pPr>
-            <a:r>
-              <a:rPr sz="1100" b="0" i="0">
-                <a:solidFill>
-                  <a:srgbClr val="6B7685"/>
-                </a:solidFill>
-                <a:latin typeface="Arial"/>
-              </a:rPr>
-              <a:t>[фото]</a:t>
-            </a:r>
-          </a:p>
-        </p:txBody>
-      </p:sp>
-      <p:sp>
-        <p:nvSpPr>
-          <p:cNvPr id="24" name="TextBox 23"/>
+      <p:pic>
+        <p:nvPicPr>
+          <p:cNvPr id="20" name="Picture 19" descr="wrench.png"/>
+          <p:cNvPicPr>
+            <a:picLocks noChangeAspect="1"/>
+          </p:cNvPicPr>
+          <p:nvPr/>
+        </p:nvPicPr>
+        <p:blipFill>
+          <a:blip r:embed="rId4"/>
+          <a:stretch>
+            <a:fillRect/>
+          </a:stretch>
+        </p:blipFill>
+        <p:spPr>
+          <a:xfrm>
+            <a:off x="9075419" y="2880360"/>
+            <a:ext cx="1645920" cy="1645920"/>
+          </a:xfrm>
+          <a:prstGeom prst="rect">
+            <a:avLst/>
+          </a:prstGeom>
+        </p:spPr>
+      </p:pic>
+      <p:sp>
+        <p:nvSpPr>
+          <p:cNvPr id="21" name="TextBox 20"/>
           <p:cNvSpPr txBox="1"/>
           <p:nvPr/>
         </p:nvSpPr>
@@ -15943,7 +15648,7 @@
       </p:sp>
       <p:sp>
         <p:nvSpPr>
-          <p:cNvPr id="25" name="Rounded Rectangle 24"/>
+          <p:cNvPr id="22" name="Rounded Rectangle 21"/>
           <p:cNvSpPr/>
           <p:nvPr/>
         </p:nvSpPr>
@@ -15991,7 +15696,7 @@
       </p:sp>
       <p:sp>
         <p:nvSpPr>
-          <p:cNvPr id="26" name="TextBox 25"/>
+          <p:cNvPr id="23" name="TextBox 22"/>
           <p:cNvSpPr txBox="1"/>
           <p:nvPr/>
         </p:nvSpPr>
@@ -22042,50 +21747,30 @@
           </a:p>
         </p:txBody>
       </p:sp>
-      <p:sp>
-        <p:nvSpPr>
-          <p:cNvPr id="13" name="Rectangle 12"/>
-          <p:cNvSpPr/>
-          <p:nvPr/>
-        </p:nvSpPr>
-        <p:spPr>
-          <a:xfrm>
-            <a:off x="6309360" y="2240280"/>
-            <a:ext cx="5239512" cy="2011680"/>
-          </a:xfrm>
-          <a:prstGeom prst="rect">
-            <a:avLst/>
-          </a:prstGeom>
-          <a:solidFill>
-            <a:srgbClr val="E5EAF0"/>
-          </a:solidFill>
-          <a:ln>
-            <a:noFill/>
-          </a:ln>
-          <a:effectLst/>
-        </p:spPr>
-        <p:style>
-          <a:lnRef idx="1">
-            <a:schemeClr val="accent1"/>
-          </a:lnRef>
-          <a:fillRef idx="3">
-            <a:schemeClr val="accent1"/>
-          </a:fillRef>
-          <a:effectRef idx="2">
-            <a:schemeClr val="accent1"/>
-          </a:effectRef>
-          <a:fontRef idx="minor">
-            <a:schemeClr val="lt1"/>
-          </a:fontRef>
-        </p:style>
-        <p:txBody>
-          <a:bodyPr rtlCol="0" anchor="ctr"/>
-          <a:lstStyle/>
-          <a:p>
-            <a:pPr algn="ctr"/>
-          </a:p>
-        </p:txBody>
-      </p:sp>
+      <p:pic>
+        <p:nvPicPr>
+          <p:cNvPr id="13" name="Picture 12" descr="pill.png"/>
+          <p:cNvPicPr>
+            <a:picLocks noChangeAspect="1"/>
+          </p:cNvPicPr>
+          <p:nvPr/>
+        </p:nvPicPr>
+        <p:blipFill>
+          <a:blip r:embed="rId3"/>
+          <a:stretch>
+            <a:fillRect/>
+          </a:stretch>
+        </p:blipFill>
+        <p:spPr>
+          <a:xfrm>
+            <a:off x="8229600" y="2331720"/>
+            <a:ext cx="1371600" cy="1371600"/>
+          </a:xfrm>
+          <a:prstGeom prst="rect">
+            <a:avLst/>
+          </a:prstGeom>
+        </p:spPr>
+      </p:pic>
       <p:sp>
         <p:nvSpPr>
           <p:cNvPr id="14" name="TextBox 13"/>
@@ -22094,16 +21779,16 @@
         </p:nvSpPr>
         <p:spPr>
           <a:xfrm>
-            <a:off x="6309360" y="3108960"/>
-            <a:ext cx="5239512" cy="457200"/>
-          </a:xfrm>
-          <a:prstGeom prst="rect">
-            <a:avLst/>
-          </a:prstGeom>
-          <a:noFill/>
-        </p:spPr>
-        <p:txBody>
-          <a:bodyPr wrap="square" lIns="0" rIns="0" tIns="0" bIns="0" anchor="ctr">
+            <a:off x="6309360" y="3749039"/>
+            <a:ext cx="5239512" cy="365760"/>
+          </a:xfrm>
+          <a:prstGeom prst="rect">
+            <a:avLst/>
+          </a:prstGeom>
+          <a:noFill/>
+        </p:spPr>
+        <p:txBody>
+          <a:bodyPr wrap="square" lIns="0" rIns="0" tIns="0" bIns="0" anchor="t">
             <a:spAutoFit/>
           </a:bodyPr>
           <a:lstStyle/>
@@ -22114,13 +21799,13 @@
               </a:lnSpc>
             </a:pPr>
             <a:r>
-              <a:rPr sz="1200" b="0" i="0">
-                <a:solidFill>
-                  <a:srgbClr val="6B7685"/>
-                </a:solidFill>
-                <a:latin typeface="Arial"/>
-              </a:rPr>
-              <a:t>[Pfizer plant photo]</a:t>
+              <a:rPr sz="1100" b="0" i="1">
+                <a:solidFill>
+                  <a:srgbClr val="4A556B"/>
+                </a:solidFill>
+                <a:latin typeface="Arial"/>
+              </a:rPr>
+              <a:t>GenAI на AWS Bedrock + SageMaker</a:t>
             </a:r>
           </a:p>
         </p:txBody>

--- a/library/lectures/lec-11/rendered/lec-11.pptx
+++ b/library/lectures/lec-11/rendered/lec-11.pptx
@@ -12877,7 +12877,7 @@
                 </a:solidFill>
                 <a:latin typeface="Arial"/>
               </a:rPr>
-              <a:t>Общее: defect rate 1–2% → class imbalance → разметка — рычаг (s16)</a:t>
+              <a:t>Общее: defect rate 1–2% → class imbalance → разметка — критический рычаг</a:t>
             </a:r>
           </a:p>
         </p:txBody>

--- a/library/lectures/lec-11/rendered/lec-11.pptx
+++ b/library/lectures/lec-11/rendered/lec-11.pptx
@@ -11822,7 +11822,7 @@
                 </a:solidFill>
                 <a:latin typeface="Arial"/>
               </a:rPr>
-              <a:t>Раздел 2 · 17 мин · 9 слайдов</a:t>
+              <a:t>Раздел 2 · 9 слайдов</a:t>
             </a:r>
           </a:p>
         </p:txBody>
@@ -21571,7 +21571,7 @@
                 </a:solidFill>
                 <a:latin typeface="Arial"/>
               </a:rPr>
-              <a:t>Раздел 3 · 17 мин · 7 слайдов</a:t>
+              <a:t>Раздел 3 · 7 слайдов</a:t>
             </a:r>
           </a:p>
         </p:txBody>
@@ -27269,7 +27269,7 @@
                 </a:solidFill>
                 <a:latin typeface="Arial"/>
               </a:rPr>
-              <a:t>12 мин</a:t>
+              <a:t>6 слайдов</a:t>
             </a:r>
           </a:p>
         </p:txBody>
@@ -27517,7 +27517,7 @@
                 </a:solidFill>
                 <a:latin typeface="Arial"/>
               </a:rPr>
-              <a:t>17 мин</a:t>
+              <a:t>9 слайдов</a:t>
             </a:r>
           </a:p>
         </p:txBody>
@@ -27765,7 +27765,7 @@
                 </a:solidFill>
                 <a:latin typeface="Arial"/>
               </a:rPr>
-              <a:t>17 мин</a:t>
+              <a:t>7 слайдов</a:t>
             </a:r>
           </a:p>
         </p:txBody>
@@ -28013,7 +28013,7 @@
                 </a:solidFill>
                 <a:latin typeface="Arial"/>
               </a:rPr>
-              <a:t>12 мин</a:t>
+              <a:t>6 слайдов</a:t>
             </a:r>
           </a:p>
         </p:txBody>
@@ -28261,7 +28261,7 @@
                 </a:solidFill>
                 <a:latin typeface="Arial"/>
               </a:rPr>
-              <a:t>6 мин</a:t>
+              <a:t>3 слайда</a:t>
             </a:r>
           </a:p>
         </p:txBody>
@@ -30226,7 +30226,7 @@
                 </a:solidFill>
                 <a:latin typeface="Arial"/>
               </a:rPr>
-              <a:t>Раздел 4 · 12 мин · 6 слайдов</a:t>
+              <a:t>Раздел 4 · 6 слайдов</a:t>
             </a:r>
           </a:p>
         </p:txBody>
@@ -40718,7 +40718,7 @@
                 </a:solidFill>
                 <a:latin typeface="Arial"/>
               </a:rPr>
-              <a:t>Раздел 5 · 6 мин · 3 слайда</a:t>
+              <a:t>Раздел 5 · 3 слайда</a:t>
             </a:r>
           </a:p>
         </p:txBody>
@@ -46180,7 +46180,7 @@
                 </a:solidFill>
                 <a:latin typeface="Arial"/>
               </a:rPr>
-              <a:t>Раздел 1 · 12 мин · 6 слайдов</a:t>
+              <a:t>Раздел 1 · 6 слайдов</a:t>
             </a:r>
           </a:p>
         </p:txBody>

--- a/library/lectures/lec-11/rendered/lec-11.pptx
+++ b/library/lectures/lec-11/rendered/lec-11.pptx
@@ -2136,7 +2136,7 @@
           <a:lstStyle/>
           <a:p>
             <a:r>
-              <a:t>Молодой Лю, председатель Foxconn, на Computex 2025 в мае заявил: после подключения AI-инструментов к Foxconn workflows, программное обеспечение теперь выполняет примерно 80 процентов работы по настройке оборудования для новой production run.</a:t>
+              <a:t>Young Liu, председатель Foxconn, на Computex 2025 в мае заявил: после подключения AI-инструментов в рабочие процессы Foxconn, программное обеспечение теперь выполняет примерно 80 процентов работы по настройке оборудования для запуска новой производственной серии.</a:t>
             </a:r>
           </a:p>
           <a:p/>
@@ -2190,7 +2190,7 @@
           <a:p/>
           <a:p>
             <a:r>
-              <a:t>И не считайте, что это критика конкретно Foxconn или Лю. Лю говорит ровно то, что говорят все вендоры. Foxconn просто более прозрачен — публично, на CEO-уровне. Это даёт нам отличный кейс для обучения.</a:t>
+              <a:t>И не считайте, что это критика конкретно Foxconn или Young Liu. Young Liu говорит ровно то, что говорят все вендоры. Foxconn просто более прозрачен — публично, на уровне председателя. Это даёт нам отличный кейс для обучения.</a:t>
             </a:r>
           </a:p>
         </p:txBody>
@@ -3262,43 +3262,49 @@
           <a:p/>
           <a:p>
             <a:r>
-              <a:t>Категория A — данные. Три критерия. Первый: MTBF — Mean Time Between Failures — больше года. Если узел отказывает раз в год, у вас за пять лет 5 failure events. Для обучения PdM-модели этого недостаточно — не хватает данных, чтобы модель научилась распознавать pattern перед отказом. Здесь работает не AI, а RCM — Reliability-Centered Maintenance — расчёт оптимального интервала ТО на основе физики и MTBF. Второй: если физика процесса известна — CFD для гидродинамики, FEA для механики, kinetics для химии — это надёжнее ML, потому что обобщает на новые конфигурации. ML интерполирует на данных обучения. Третий: эталонная разметка дорогая — defect rate меньше 1 процента, разметка дорогая. Альтернативы для категории A: physics-based simulation, DOE для эксплоративных экспериментов, SPC для статистического контроля.</a:t>
+              <a:t>Категория A — данные. Три критерия. Первый: средняя наработка на отказ больше года. Если узел отказывает раз в год, у вас за пять лет 5 событий отказа. Для обучения модели прогностического обслуживания этого недостаточно — не хватает данных, чтобы модель научилась распознавать паттерн перед отказом. Здесь работает не AI, а RCM — надёжностно-ориентированное обслуживание — расчёт оптимального интервала технического обслуживания на основе физики и наработки на отказ. Второй: если физика процесса известна — CFD для гидродинамики, FEA для механики, кинетика для химии — это надёжнее ML, потому что обобщает на новые конфигурации. ML интерполирует на данных обучения. Третий: эталонная разметка дорогая — доля дефектов меньше 1 процента, разметка дорогая. Альтернативы для категории A: физические симуляции, план эксперимента, статистический контроль.</a:t>
             </a:r>
           </a:p>
           <a:p/>
           <a:p>
             <a:r>
-              <a:t>Категория B — стоимость. Два критерия. Четвёртый: false positive cost больше чем 10x false negative. Если ложная тревога дороже пропущенного дефекта — значит, мы скорее остановим линию по ошибочной AI-тревоге, чем пропустим дефект. Здесь работает SPC + RCM, которые предсказуемы и калибруются вручную. Пятый: SIL 2/3 safety-critical — это специальные уровни сертификации для контуров с риском для жизни. ML certification на SIL 2/3 — это очень дорого и долго, обычно нерентабельно. Альтернативы для B: SPC, RCM, rules-based.</a:t>
+              <a:t>Категория B — стоимость. Два критерия. Четвёртый: цена ложного срабатывания больше чем в 10 раз цены пропуска. Если ложная тревога дороже пропущенного дефекта — значит, мы скорее остановим линию по ошибочной AI-тревоге, чем пропустим дефект. Здесь работает статистический контроль плюс надёжностно-ориентированное обслуживание, которые предсказуемы и калибруются вручную. Пятый: критичный по безопасности контур — это специальные уровни сертификации для контуров с риском для жизни. Сертификация ML на таком уровне — это очень дорого и долго, обычно нерентабельно. Альтернативы для категории B: SPC, RCM, правило-ориентированные системы.</a:t>
             </a:r>
           </a:p>
           <a:p/>
           <a:p>
             <a:r>
-              <a:t>Категория C — регуляторика. Три критерия. Шестой: audit trail обязателен — FDA Part 11, GAMP 5. Black-box ML здесь не проходит, нужен explainable ML, hybrid с rules или on-premise решение. Седьмой: ATEX Zone 0 — постоянное присутствие взрывоопасной смеси. Hardware restriction, non-certified AI запрещён физически. Восьмой: Указ 250 в России — domestic software на КИИ-объектах. SaaS-облака не подходят, нужно on-premise. Альтернативы для C: explainable ML, hybrid, on-premise.</a:t>
+              <a:t>Категория C — регуляторика. Три критерия. Шестой: журнал аудита обязателен — FDA Part 11, GAMP 5. Чёрный ящик ML здесь не проходит, нужен объяснимый ML, гибридные подходы или развёртывание на собственной инфраструктуре. Седьмой: взрывоопасная зона 0 (ATEX) — постоянное присутствие взрывоопасной смеси. Аппаратные ограничения, несертифицированный AI запрещён физически. Восьмой: Указ 250 в России — отечественное ПО на объектах критической инфраструктуры. Облачные сервисы не подходят, нужно развёртывание на собственной инфраструктуре. Альтернативы для категории C: объяснимый ML, гибриды, on-premise.</a:t>
             </a:r>
           </a:p>
           <a:p/>
           <a:p>
             <a:r>
-              <a:t>Категория D — человек. Три критерия. Девятый: operator distrust. Если оператор не доверяет AI, он будет workaround — отключит, проигнорирует, найдёт способ обойти. Это структурный risk, особенно в смыслах, где операторы — союзная сторона, не противник. Toyota proof — augmentation, не replacement. Десятый: pilot без go-criteria. Если pilot не имеет explicit go/no-go critериев определённых до старта — он попадает в 80-95 процентов pilot purgatory. Одиннадцатый: demo-hype без 6-месячного production track record. Если вендор показывает только демо, не пускает в production-customer reference — buyer beware. Альтернативы для D: Six Sigma, Jidoka, structured pilots.</a:t>
+              <a:t>Категория D — человек. Два критерия. Девятый: недоверие оператора. Если оператор не доверяет AI, он будет обходить — отключит, проигнорирует, найдёт способ обойти. Это структурный риск, особенно в смыслах, где операторы — союзная сторона, не противник. Toyota Jidoka — расширение, не замещение. Десятый: пилот без критериев успеха. Если пилот не имеет явных критериев «идти/не идти», определённых до старта — он попадает в 80–95 процентов застревания на пилотной стадии. Альтернативы для категории D: Six Sigma, Jidoka, структурированные пилоты.</a:t>
             </a:r>
           </a:p>
           <a:p/>
           <a:p>
             <a:r>
-              <a:t>Это 11 критериев в 4 категориях. Запомните таксономию категорий — это первый шаг применения. Конкретные критерии вы будете adapt под свой контекст.</a:t>
+              <a:t>Это 10 критериев в 4 категориях. Плюс один бонус — анти-hype критерий. Одиннадцатый: уровень функциональной безопасности SIL 2/3 для контуров с риском для жизни. Сертификация чёрного ящика ML практически нереализуема — индустриальный стандарт IEC 61508 требует прослеживаемого пути от требования к коду, а нейросеть такой путь предоставить не может. Это анти-hype критерий — отдельная категория, которая отсекает целый класс заявлений.</a:t>
             </a:r>
           </a:p>
           <a:p/>
           <a:p>
             <a:r>
-              <a:t>И параллельно — три вопроса к вендору. Запомните их как формулу. Baseline до AI, окно измерения, перечень вмешательств. Плюс четвёртый вопрос про OEE — какой компонент эффективности улучшается. Это инструмент для кармана, который работает на любом vendor pitch.</a:t>
+              <a:t>Запомните таксономию категорий — это первый шаг применения. Конкретные критерии вы будете адаптировать под свой контекст.</a:t>
             </a:r>
           </a:p>
           <a:p/>
           <a:p>
             <a:r>
-              <a:t>В следующем слайде — матрица альтернативных инструментов. Через слайд — worked example Pfizer Vox, где мы пройдём framework шаг за шагом.</a:t>
+              <a:t>И параллельно — три вопроса к вендору. Запомните их как формулу. Базовая линия до AI, окно измерения, перечень вмешательств. Плюс четвёртый вопрос про OEE — какой компонент эффективности улучшается. Это инструмент для кармана, который работает на любом предложении вендора.</a:t>
+            </a:r>
+          </a:p>
+          <a:p/>
+          <a:p>
+            <a:r>
+              <a:t>В следующем слайде — матрица альтернативных инструментов. Через слайд — разобранный пример Pfizer Vox, где мы пройдём рамку шаг за шагом.</a:t>
             </a:r>
           </a:p>
         </p:txBody>
@@ -3894,7 +3900,7 @@
           <a:lstStyle/>
           <a:p>
             <a:r>
-              <a:t>Это финальный практический слайд лекции. Запомните этот framework — он работает на любом AI-проекте, который вы увидите в карьере.</a:t>
+              <a:t>Это финальный практический слайд лекции. Запомните эту рамку — она работает на любом AI-проекте, который вы увидите в карьере.</a:t>
             </a:r>
           </a:p>
           <a:p/>
@@ -3906,55 +3912,55 @@
           <a:p/>
           <a:p>
             <a:r>
-              <a:t>Первый — identify class. Дискретное или процессное? Это первое разделение, и из него следует вся дальнейшая логика. Какая физика — штучные единицы или непрерывный поток? Какая регуляторика — ISO 9001 или FDA Part 11 или ATEX? Какая культура — Toyota Jidoka или Tesla replace?</a:t>
+              <a:t>Первый — класс процесса. Дискретное или процессное? Это первое разделение, и из него следует вся дальнейшая логика. Какая физика — штучные единицы или непрерывный поток? Какая регуляторика — ISO 9001 или FDA Part 11 или ATEX? Какая культура — Toyota Jidoka или Tesla с заменой человека?</a:t>
             </a:r>
           </a:p>
           <a:p/>
           <a:p>
             <a:r>
-              <a:t>Второй — map alternatives. Прежде чем тянуться к ML, перечислите неMLные инструменты. SPC, DOE, MPC, RCM, physics-based simulation, rules-based vision. Какие из них применимы к вашей задаче? Какие частично решают её?</a:t>
+              <a:t>Второй — альтернативы. Прежде чем тянуться к ML, перечислите неMLные инструменты. SPC, DOE, MPC, RCM, физические симуляции, правило-ориентированное зрение. Какие из них применимы к вашей задаче? Какие частично решают её?</a:t>
             </a:r>
           </a:p>
           <a:p/>
           <a:p>
             <a:r>
-              <a:t>Третий — apply 4 categories. Пройдите критерии: данные, стоимость, регуляторика, человек. Если все четыре галочки — AI применим. Если хотя бы одна категория проблематична — либо адаптируйте архитектуру, либо рассматривайте альтернативы из step 2.</a:t>
+              <a:t>Третий — применить 4 категории. Пройдите критерии: данные, стоимость, регуляторика, человек. Если все четыре галочки — AI применим. Если хотя бы одна категория проблематична — либо адаптируйте архитектуру, либо рассматривайте альтернативы из шага 2.</a:t>
             </a:r>
           </a:p>
           <a:p/>
           <a:p>
             <a:r>
-              <a:t>Четвёртый — pilot с explicit go-criteria. До запуска pilot определите: baseline до AI, измерительное окно, go/no-go threshold. Если pilot стартует без этих трёх — он попадает в 80-95 процентов pilot purgatory. Это правило, которое исключает большинство неудач.</a:t>
+              <a:t>Четвёртый — пилот с явными критериями успеха. До запуска пилота определите: базовая линия до AI, окно измерения, критерий «идти/не идти». Если пилот стартует без этих трёх — он попадает в 80–95 процентов застревания на пилотной стадии. Это правило, которое исключает большинство неудач.</a:t>
             </a:r>
           </a:p>
           <a:p/>
           <a:p>
             <a:r>
-              <a:t>Пятый — production с HITL и audit trail. Если cвичите pilot и переходите в production: recommend mode для safety-critical контуров. Validated. Traceable. Audit trail для регулятора и для собственного контроля. Если вы не можете объяснить, почему модель приняла решение — это знак, что архитектуру нужно пересмотреть.</a:t>
+              <a:t>Пятый — эксплуатация с человеком в цикле и журналом аудита. Если перешли из пилота в промышленную эксплуатацию: режим «характеристика» для контуров с риском для жизни. Валидировано. Прослеживается. Журнал аудита для регулятора и для собственного контроля. Если вы не можете объяснить, почему модель приняла решение — это знак, что архитектуру нужно пересмотреть.</a:t>
             </a:r>
           </a:p>
           <a:p/>
           <a:p>
             <a:r>
-              <a:t>И параллельно — четыре вопроса к вендору. Я уже их повторял несколько раз сегодня, и сейчас повторю ещё раз, потому что они работают как формула в кармане.</a:t>
+              <a:t>И параллельно — пять вопросов к вендору. Я уже их повторял несколько раз сегодня, и сейчас повторю ещё раз, потому что они работают как формула в кармане.</a:t>
             </a:r>
           </a:p>
           <a:p/>
           <a:p>
             <a:r>
-              <a:t>Baseline до AI — что было раньше? Окно измерения — за какой период? Перечень вмешательств — что реально автоматизировано? OEE-канал — какой компонент эффективности улучшается?</a:t>
+              <a:t>Базовая линия до AI — что было раньше? Окно измерения — за какой период? Перечень вмешательств — что реально автоматизировано? Канал OEE — какой компонент эффективности улучшается? И пятый, наиболее жёсткий — прошлые провалы. Покажите три задокументированных провала за последние 24 месяца в той же индустрии. Если вендор не может назвать ни одного — он либо не работал в этой индустрии, либо скрывает. Оба варианта — повод не запускать пилот.</a:t>
             </a:r>
           </a:p>
           <a:p/>
           <a:p>
             <a:r>
-              <a:t>Эти четыре вопроса в комбинации с 5-step framework — это всё, что вам нужно для критической оценки AI-проектов в производстве. Если ваш AI-projector сегодня знает только то, что мы разобрали — он будет в верхней группе инженеров по уровню профессионализма.</a:t>
+              <a:t>Эти пять вопросов в комбинации с 5-шаговой рамкой — это всё, что вам нужно для критической оценки AI-проектов в производстве. Если ваш AI-выпускник сегодня знает только то, что мы разобрали — он будет в верхней группе инженеров по уровню профессионализма.</a:t>
             </a:r>
           </a:p>
           <a:p/>
           <a:p>
             <a:r>
-              <a:t>И последняя нота — hybrid patterns. PINN, CIRL, ML over SPC, PLC plus edge ML coprocessor. Это четыре примера того, как ML интегрируется с проверенными неMLными методами, а не пытается их заменить. Это правильный путь интеграции AI в production. Не «AI вместо PID», а «AI расширяет PID, не замещает».</a:t>
+              <a:t>И последняя нота — гибридные паттерны. PINN, CIRL, ML поверх SPC, PLC плюс ML-копроцессор на крае. Это четыре примера того, как ML интегрируется с проверенными неMLными методами, а не пытается их заменить. Это правильный путь интеграции AI в промышленность. Не «AI вместо PID», а «AI расширяет PID, не замещает».</a:t>
             </a:r>
           </a:p>
         </p:txBody>
@@ -4242,7 +4248,7 @@
           <a:lstStyle/>
           <a:p>
             <a:r>
-              <a:t>Q&amp;A слайд. Пять вопросов к вендору — для кармана, и три типичных студенческих вопроса.</a:t>
+              <a:t>Слайд вопросов и ответов. Пять вопросов к вендору — для кармана, и три типичных студенческих вопроса.</a:t>
             </a:r>
           </a:p>
           <a:p/>
@@ -4254,7 +4260,7 @@
           <a:p/>
           <a:p>
             <a:r>
-              <a:t>Первый — baseline до AI. На какой объём работы, времени, стоимости вы сравниваете? Что было до внедрения AI? Если вендор не знает baseline — он не знает, чему равны его проценты.</a:t>
+              <a:t>Первый — базовая линия до AI. На какой объём работы, времени, стоимости вы сравниваете? Что было до внедрения AI? Если вендор не знает базовую линию — он не знает, чему равны его проценты.</a:t>
             </a:r>
           </a:p>
           <a:p/>
@@ -4266,19 +4272,19 @@
           <a:p/>
           <a:p>
             <a:r>
-              <a:t>Третий — перечень вмешательств. Какие AI-инструменты учтены в «эффекте»? Что реально автоматизировано, что — частично, что осталось на человеке? Цитата Foxconn про «80 процентов configuration work» — это типичный пример, где «80» это compound число, в котором смешаны разные операции.</a:t>
+              <a:t>Третий — перечень вмешательств. Какие AI-инструменты учтены в «эффекте»? Что реально автоматизировано, что — частично, что осталось на человеке? Цитата Foxconn про «80 процентов работы по настройке» — это типичный пример, где «80» — это составное число, в котором смешаны разные операции.</a:t>
             </a:r>
           </a:p>
           <a:p/>
           <a:p>
             <a:r>
-              <a:t>Четвёртый — OEE-канал. В какой компонент OEE добавляется эффект — availability, performance или quality? Это разделяет «25 процентов снижение downtime» на смысловые подкатегории.</a:t>
+              <a:t>Четвёртый — канал OEE. В какой компонент OEE добавляется эффект — доступность, производительность или качество? Это разделяет «25 процентов снижение простоев» на смысловые подкатегории.</a:t>
             </a:r>
           </a:p>
           <a:p/>
           <a:p>
             <a:r>
-              <a:t>Пятый — архитектурный класс. Это AI как chat-помощник для оператора, или AI как autonomous controller, замыкающий control loop? FDA / ATEX / SIL 2-3 разрешают этот класс?</a:t>
+              <a:t>Пятый — прошлые провалы. Это самый жёсткий вопрос. Попросите вендора показать три задокументированных провала за последние 24 месяца в той же индустрии. Не «у нас всё получалось», а конкретные провалы с конкретными причинами. Если вендор не может назвать ни одного — он либо не работал в этой индустрии, либо скрывает неудобные кейсы. Оба варианта — повод не запускать пилот. Сильный вендор, наоборот, открыто расскажет о провалах и о том, что из них выучил.</a:t>
             </a:r>
           </a:p>
           <a:p/>
@@ -4296,19 +4302,19 @@
           <a:p/>
           <a:p>
             <a:r>
-              <a:t>«Мне говорят внедрить AI на нашем процессе, но я не уверен. Что делать?» Пройдите 5-step framework, который мы разобрали на s35. Если хотя бы один шаг не проходит — отчитайтесь руководству с конкретными цифрами, какой именно шаг не проходит и почему. Не запускайте pilot без go-criteria — это самый частый способ попасть в 80-95 процентов pilot purgatory.</a:t>
+              <a:t>«Мне говорят внедрить AI на нашем процессе, но я не уверен. Что делать?» Пройдите 5-шаговую рамку, которую мы разобрали на слайде 35. Если хотя бы один шаг не проходит — отчитайтесь руководству с конкретными цифрами, какой именно шаг не проходит и почему. Не запускайте пилот без критериев успеха — это самый частый способ попасть в 80–95 процентов застревания на пилотной стадии.</a:t>
             </a:r>
           </a:p>
           <a:p/>
           <a:p>
             <a:r>
-              <a:t>«SPC vs ML — что выбрать?» Зависит от регуляторной среды и количества переменных. Если FDA Part 11 и параметры univariate — SPC. Если multi-variate и нужно recommend mode с audit trail — ML, но как recommend, не autonomous. Hybrid: SPC + ML over residuals. Statistical baseline ловит первые 70 процентов, ML добавляется на нелинейном остатке. Это defensible перед регулятором, потому что SPC — known object.</a:t>
+              <a:t>«SPC или ML — что выбрать?» Зависит от регуляторной среды и количества переменных. Если FDA Part 11 и параметры одномерные — SPC. Если многомерные и нужен режим «характеристика» с журналом аудита — ML, но как «характеристика», не автономный контроллер. Гибрид: SPC + ML на остатке. Статистическая база ловит первые 70 процентов, ML добавляется на нелинейном остатке. Это защищается перед регулятором, потому что SPC — известный объект.</a:t>
             </a:r>
           </a:p>
           <a:p/>
           <a:p>
             <a:r>
-              <a:t>«RL vs MPC — что лучше?» MPC dominates control loop. RL дополняет MPC на high-level scheduling: какой batch запускать, когда переключаться. Safe-fallback к MPC mandatory — если RL начинает дрейфовать, система автоматически переключается на MPC. Не deploy RL без CIRL-обвязки или explicit MPC backup.</a:t>
+              <a:t>«RL или MPC — что лучше?» MPC доминирует в контуре управления. RL дополняет MPC на верхнеуровневом планировании: какую партию запускать, когда переключаться. Безопасный откат к MPC обязателен — если RL начинает дрейфовать, система автоматически переключается на MPC. Не разворачивайте RL без CIRL-обвязки или явного MPC-резерва.</a:t>
             </a:r>
           </a:p>
           <a:p/>
@@ -18644,7 +18650,7 @@
                 </a:solidFill>
                 <a:latin typeface="Arial"/>
               </a:rPr>
-              <a:t>Янг Лиу, председатель Foxconn, Computex, май 2025 — упражнение в критической оценке</a:t>
+              <a:t>Young Liu, председатель Foxconn, Computex, май 2025 — упражнение в критической оценке</a:t>
             </a:r>
           </a:p>
         </p:txBody>
@@ -18770,7 +18776,7 @@
                 </a:solidFill>
                 <a:latin typeface="Arial"/>
               </a:rPr>
-              <a:t>— Янг Лиу, председатель Foxconn · Computex, май 2025</a:t>
+              <a:t>— Young Liu, председатель Foxconn · Computex, май 2025</a:t>
             </a:r>
           </a:p>
         </p:txBody>
@@ -37985,7 +37991,7 @@
                 </a:solidFill>
                 <a:latin typeface="Arial"/>
               </a:rPr>
-              <a:t>Пять шагов + четыре вопроса к вендору + гибридные паттерны</a:t>
+              <a:t>Пять шагов + пять вопросов к вендору + гибридные паттерны</a:t>
             </a:r>
           </a:p>
         </p:txBody>

--- a/library/lectures/lec-11/rendered/lec-11.pptx
+++ b/library/lectures/lec-11/rendered/lec-11.pptx
@@ -3782,7 +3782,7 @@
           <a:p/>
           <a:p>
             <a:r>
-              <a:t>Пивоварня. Линия идёт 60 тысяч бутылок в час, миллион в сутки. Дефекты — повреждённые этикетки, кривые крышки, недолив. Доля брака примерно полпроцента. Ручной отбор на такой скорости пропускает дефекты этикеток — глаз не успевает. Периодический контроль — взяли каждую сотую, посмотрели — не покрывает все.</a:t>
+              <a:t>Пивоварня. Линия идёт 30 тысяч бутылок в час, около 700 тысяч в сутки. Дефекты — повреждённые этикетки, кривые крышки, недолив. Доля брака примерно полпроцента. Ручной отбор на такой скорости пропускает дефекты этикеток — глаз не успевает. Периодический контроль — взяли каждую сотую, посмотрели — не покрывает все.</a:t>
             </a:r>
           </a:p>
           <a:p/>
@@ -3806,7 +3806,7 @@
           <a:p/>
           <a:p>
             <a:r>
-              <a:t>Шаг третий — данные. Миллион бутылок в день, дефект полпроцента — получаем пять тысяч размеченных дефектных примеров каждый день. Класс-баланс достижим за две-три недели работы линии. Эталонная разметка дешёвая — это не рентген сварного шва, это визуально очевидные кривые этикетки или недолив. Час оператора пятьсот рублей в РФ, по сто примеров в час, расходы оценимы. Категория «данные» проходит легко.</a:t>
+              <a:t>Шаг третий — данные. Семьсот тысяч бутылок в день, дефект полпроцента — получаем три с половиной тысячи размеченных дефектных примеров каждый день. Класс-баланс за тридцать дней работы линии. Эталонная разметка дешёвая — это не рентген сварного шва, это визуально очевидные кривые этикетки или недолив. Час оператора пятьсот рублей в РФ, по сто примеров в час, расходы оценимы. Категория «данные» проходит легко.</a:t>
             </a:r>
           </a:p>
           <a:p/>
@@ -36799,7 +36799,7 @@
               <a:t>Дискретное.
 Бутылки/банки —
 штучный счёт.
-Скорость 60 000 в час.</a:t>
+Скорость 30 000 в час.</a:t>
             </a:r>
           </a:p>
         </p:txBody>
@@ -37297,9 +37297,9 @@
                 </a:solidFill>
                 <a:latin typeface="Arial"/>
               </a:rPr>
-              <a:t>&gt;1 млн бутылок/день,
-дефекты ~0,5% → 5 000 размеченных примеров в день.
-Класс-баланс достижим.</a:t>
+              <a:t>~700 000 бутылок/день,
+дефекты ~0,5% → 3 500 размеченных примеров в день.
+Класс-баланс за 30 дней.</a:t>
             </a:r>
           </a:p>
         </p:txBody>
